--- a/SELLL-Engine/QRFloorGenie-Disco-Deck.pptx
+++ b/SELLL-Engine/QRFloorGenie-Disco-Deck.pptx
@@ -4171,7 +4171,7 @@
                   <a:srgbClr val="888899"/>
                 </a:solidFill>
               </a:rPr>
-              <a:t>SELLL.io  |  Signal-Intelligent Revenue Engine  |  selll.io/audit</a:t>
+              <a:t>SELLL.io  |  Signal-Intelligent Revenue Engine  |  cal.com/collins-collins-h1q7yn/30min</a:t>
             </a:r>
           </a:p>
         </p:txBody>
@@ -11680,7 +11680,7 @@
                   <a:srgbClr val="1A1A2E"/>
                 </a:solidFill>
               </a:rPr>
-              <a:t>Ready to start?  Reply here  or  book at  selll.io/audit</a:t>
+              <a:t>Ready to start?  Reply here  or  book at  cal.com/collins-collins-h1q7yn/30min</a:t>
             </a:r>
           </a:p>
         </p:txBody>

--- a/SELLL-Engine/QRFloorGenie-Disco-Deck.pptx
+++ b/SELLL-Engine/QRFloorGenie-Disco-Deck.pptx
@@ -4171,7 +4171,7 @@
                   <a:srgbClr val="888899"/>
                 </a:solidFill>
               </a:rPr>
-              <a:t>SELLL.io  |  Signal-Intelligent Revenue Engine  |  cal.com/collins-collins-h1q7yn/30min</a:t>
+              <a:t>SELLL.io  |  Signal-Intelligent Revenue Engine  |  cal.com/collins-ogiki-x4fokk/30min</a:t>
             </a:r>
           </a:p>
         </p:txBody>
@@ -11680,7 +11680,7 @@
                   <a:srgbClr val="1A1A2E"/>
                 </a:solidFill>
               </a:rPr>
-              <a:t>Ready to start?  Reply here  or  book at  cal.com/collins-collins-h1q7yn/30min</a:t>
+              <a:t>Ready to start?  Reply here  or  book at  cal.com/collins-ogiki-x4fokk/30min</a:t>
             </a:r>
           </a:p>
         </p:txBody>
